--- a/docs/VLab-Project-Review.pptx
+++ b/docs/VLab-Project-Review.pptx
@@ -16751,7 +16751,7 @@
                 </a:solidFill>
                 <a:latin typeface="Segoe UI"/>
               </a:rPr>
-              <a:t>41</a:t>
+              <a:t>43</a:t>
             </a:r>
           </a:p>
         </p:txBody>
